--- a/slides/slide_09.pptx
+++ b/slides/slide_09.pptx
@@ -26,61 +26,38 @@
       <p:bold r:id="rId9"/>
     </p:embeddedFont>
     <p:embeddedFont>
-      <p:font typeface="Bebas Neue" panose="020B0606020202050201" pitchFamily="2" charset="0"/>
+      <p:font typeface="Hanken Grotesk" panose="020B0604020202020204" charset="0"/>
       <p:regular r:id="rId10"/>
-    </p:embeddedFont>
-    <p:embeddedFont>
-      <p:font typeface="DM Mono" panose="020B0509040201040103" pitchFamily="1" charset="0"/>
-      <p:regular r:id="rId11"/>
+      <p:bold r:id="rId11"/>
       <p:italic r:id="rId12"/>
-    </p:embeddedFont>
-    <p:embeddedFont>
-      <p:font typeface="Hanken Grotesk" panose="020B0604020202020204" charset="0"/>
-      <p:regular r:id="rId13"/>
-      <p:bold r:id="rId14"/>
-      <p:italic r:id="rId15"/>
-      <p:boldItalic r:id="rId16"/>
-    </p:embeddedFont>
-    <p:embeddedFont>
-      <p:font typeface="Open Sans" panose="020B0606030504020204" pitchFamily="2" charset="0"/>
-      <p:regular r:id="rId17"/>
-      <p:bold r:id="rId18"/>
-      <p:italic r:id="rId19"/>
-      <p:boldItalic r:id="rId20"/>
+      <p:boldItalic r:id="rId13"/>
     </p:embeddedFont>
     <p:embeddedFont>
       <p:font typeface="Raleway" pitchFamily="2" charset="0"/>
-      <p:regular r:id="rId21"/>
-      <p:bold r:id="rId22"/>
-      <p:italic r:id="rId23"/>
-      <p:boldItalic r:id="rId24"/>
+      <p:regular r:id="rId14"/>
+      <p:bold r:id="rId15"/>
+      <p:italic r:id="rId16"/>
+      <p:boldItalic r:id="rId17"/>
     </p:embeddedFont>
     <p:embeddedFont>
       <p:font typeface="Raleway Black" pitchFamily="2" charset="0"/>
-      <p:bold r:id="rId25"/>
-      <p:boldItalic r:id="rId26"/>
+      <p:bold r:id="rId18"/>
+      <p:boldItalic r:id="rId19"/>
     </p:embeddedFont>
     <p:embeddedFont>
       <p:font typeface="Raleway ExtraBold" pitchFamily="2" charset="0"/>
-      <p:bold r:id="rId27"/>
-      <p:boldItalic r:id="rId28"/>
+      <p:bold r:id="rId20"/>
+      <p:boldItalic r:id="rId21"/>
     </p:embeddedFont>
     <p:embeddedFont>
       <p:font typeface="Roboto Medium" panose="02000000000000000000" pitchFamily="2" charset="0"/>
-      <p:regular r:id="rId29"/>
-      <p:italic r:id="rId30"/>
+      <p:regular r:id="rId22"/>
+      <p:italic r:id="rId23"/>
     </p:embeddedFont>
     <p:embeddedFont>
       <p:font typeface="Roboto" panose="02000000000000000000" pitchFamily="2"/>
-      <p:bold r:id="rId31"/>
-      <p:boldItalic r:id="rId32"/>
-    </p:embeddedFont>
-    <p:embeddedFont>
-      <p:font typeface="Segoe UI" panose="020B0502040204020203" pitchFamily="2" charset="0"/>
-      <p:regular r:id="rId33"/>
-      <p:bold r:id="rId34"/>
-      <p:italic r:id="rId35"/>
-      <p:boldItalic r:id="rId36"/>
+      <p:bold r:id="rId24"/>
+      <p:boldItalic r:id="rId25"/>
     </p:embeddedFont>
   </p:embeddedFontLst>
   <p:custDataLst>
@@ -884,7 +861,7 @@
           <a:bodyPr/>
           <a:lstStyle/>
           <a:p>
-            <a:fld id="{491C8ACF-785C-463F-9F34-DE3D1467A196}" type="datetimeFigureOut">
+            <a:fld id="{BE9BB2F3-CFB6-41E7-B556-A6DD8A53B1B3}" type="datetimeFigureOut">
               <a:rPr lang="en-US" smtClean="0"/>
               <a:t>11/7/2009</a:t>
             </a:fld>
@@ -1048,7 +1025,7 @@
           <a:bodyPr/>
           <a:lstStyle/>
           <a:p>
-            <a:fld id="{06FCA12F-8C25-4643-87F3-CFE054272580}" type="datetimeFigureOut">
+            <a:fld id="{1BBA0D0F-FE3E-4522-8AC6-91535880918F}" type="datetimeFigureOut">
               <a:rPr lang="en-US" smtClean="0"/>
               <a:t>11/7/2009</a:t>
             </a:fld>
@@ -1212,7 +1189,7 @@
           <a:bodyPr/>
           <a:lstStyle/>
           <a:p>
-            <a:fld id="{266512AE-CD64-4202-99FB-B5388444F809}" type="datetimeFigureOut">
+            <a:fld id="{C3A6F1B1-10AF-423B-9AFE-1E0945AB2BDB}" type="datetimeFigureOut">
               <a:rPr lang="en-US" smtClean="0"/>
               <a:t>11/7/2009</a:t>
             </a:fld>
@@ -13117,7 +13094,7 @@
           <a:bodyPr/>
           <a:lstStyle/>
           <a:p>
-            <a:fld id="{C027F595-4606-4991-AF16-07905B65A78E}" type="datetimeFigureOut">
+            <a:fld id="{D1BA0C0E-C700-4DF8-AC8B-10E8E8119893}" type="datetimeFigureOut">
               <a:rPr lang="en-US" smtClean="0"/>
               <a:t>11/7/2009</a:t>
             </a:fld>
@@ -33218,7 +33195,7 @@
           <a:bodyPr/>
           <a:lstStyle/>
           <a:p>
-            <a:fld id="{87675D36-8F48-4F80-9CBD-7F851DD5588A}" type="datetimeFigureOut">
+            <a:fld id="{7D55E840-C7AC-4AE5-B0C1-9E279C77853D}" type="datetimeFigureOut">
               <a:rPr lang="en-US" smtClean="0"/>
               <a:t>11/7/2009</a:t>
             </a:fld>
@@ -38865,7 +38842,7 @@
           <a:bodyPr/>
           <a:lstStyle/>
           <a:p>
-            <a:fld id="{7DDEF899-6DAA-4C63-AA77-FFA7174DC5DD}" type="datetimeFigureOut">
+            <a:fld id="{E01106F6-7788-4CF5-964D-18B0B012EBA6}" type="datetimeFigureOut">
               <a:rPr lang="en-US" smtClean="0"/>
               <a:t>11/7/2009</a:t>
             </a:fld>
@@ -39254,7 +39231,7 @@
           <a:bodyPr/>
           <a:lstStyle/>
           <a:p>
-            <a:fld id="{4CA85999-6B6F-4BFE-ABEA-34DBFD6BEB28}" type="datetimeFigureOut">
+            <a:fld id="{6436F034-4805-4785-BCE0-EBAD06B4D071}" type="datetimeFigureOut">
               <a:rPr lang="en-US" smtClean="0"/>
               <a:t>11/7/2009</a:t>
             </a:fld>
@@ -39367,7 +39344,7 @@
           <a:bodyPr/>
           <a:lstStyle/>
           <a:p>
-            <a:fld id="{E782EDF8-B05E-40E6-B80C-443E07BF2AA1}" type="datetimeFigureOut">
+            <a:fld id="{2205078D-F744-4F8D-A89D-F9AA032B19D5}" type="datetimeFigureOut">
               <a:rPr lang="en-US" smtClean="0"/>
               <a:t>11/7/2009</a:t>
             </a:fld>
@@ -39457,7 +39434,7 @@
           <a:bodyPr/>
           <a:lstStyle/>
           <a:p>
-            <a:fld id="{1C24797F-845E-4DCC-A0BB-AC94819D920E}" type="datetimeFigureOut">
+            <a:fld id="{AD707079-86BE-4A98-BE69-2EE46A4413E0}" type="datetimeFigureOut">
               <a:rPr lang="en-US" smtClean="0"/>
               <a:t>11/7/2009</a:t>
             </a:fld>
@@ -39712,7 +39689,7 @@
           <a:bodyPr/>
           <a:lstStyle/>
           <a:p>
-            <a:fld id="{E7AED2A9-983F-419D-B44D-52A8E3075A50}" type="datetimeFigureOut">
+            <a:fld id="{4B8E0FE5-FD91-49BA-844B-FFEE3B87DACD}" type="datetimeFigureOut">
               <a:rPr lang="en-US" smtClean="0"/>
               <a:t>11/7/2009</a:t>
             </a:fld>
@@ -39944,7 +39921,7 @@
           <a:bodyPr/>
           <a:lstStyle/>
           <a:p>
-            <a:fld id="{E6824543-3754-448C-BA7F-2FB9481EE156}" type="datetimeFigureOut">
+            <a:fld id="{75FF442E-FEC6-479D-B211-64119F9548C4}" type="datetimeFigureOut">
               <a:rPr lang="en-US" smtClean="0"/>
               <a:t>11/7/2009</a:t>
             </a:fld>
@@ -41804,10 +41781,12 @@
           <a:lstStyle/>
           <a:p>
             <a:r>
-              <a:rPr lang="en"/>
+              <a:rPr lang="en" b="1">
+                <a:latin typeface="Arial"/>
+                <a:cs typeface="Arial"/>
+              </a:rPr>
               <a:t>ВЫРУЧКА ПО КВАРТАЛАМ</a:t>
             </a:r>
-            <a:endParaRPr lang="en"/>
           </a:p>
         </p:txBody>
       </p:sp>
@@ -41849,18 +41828,16 @@
               <a:buNone/>
             </a:pPr>
             <a:r>
-              <a:rPr lang="en" sz="1600" b="0">
-                <a:latin typeface="Raleway Black"/>
-                <a:ea typeface="Raleway Black"/>
-                <a:cs typeface="Raleway Black"/>
+              <a:rPr lang="en" sz="1600" b="1">
+                <a:latin typeface="Arial"/>
+                <a:cs typeface="Arial"/>
                 <a:sym typeface="Raleway Black"/>
               </a:rPr>
               <a:t>Q4</a:t>
             </a:r>
-            <a:endParaRPr sz="1600" b="0">
-              <a:latin typeface="Raleway Black"/>
-              <a:ea typeface="Raleway Black"/>
-              <a:cs typeface="Raleway Black"/>
+            <a:endParaRPr sz="1600" b="1">
+              <a:latin typeface="Arial"/>
+              <a:cs typeface="Arial"/>
               <a:sym typeface="Raleway Black"/>
             </a:endParaRPr>
           </a:p>
@@ -41904,26 +41881,30 @@
               <a:buNone/>
             </a:pPr>
             <a:r>
-              <a:rPr lang="en" err="1"/>
+              <a:rPr lang="en" err="1">
+                <a:latin typeface="Arial"/>
+                <a:cs typeface="Arial"/>
+              </a:rPr>
               <a:t>Октябрь</a:t>
             </a:r>
             <a:r>
               <a:rPr lang="en">
-                <a:latin typeface="Hanken Grotesk"/>
-                <a:ea typeface="Hanken Grotesk"/>
-                <a:cs typeface="Hanken Grotesk"/>
+                <a:latin typeface="Arial"/>
+                <a:cs typeface="Arial"/>
                 <a:sym typeface="Hanken Grotesk"/>
               </a:rPr>
               <a:t> - </a:t>
             </a:r>
             <a:r>
-              <a:rPr lang="en" err="1"/>
+              <a:rPr lang="en" err="1">
+                <a:latin typeface="Arial"/>
+                <a:cs typeface="Arial"/>
+              </a:rPr>
               <a:t>Декабрь</a:t>
             </a:r>
             <a:endParaRPr err="1">
-              <a:latin typeface="Hanken Grotesk"/>
-              <a:ea typeface="Hanken Grotesk"/>
-              <a:cs typeface="Hanken Grotesk"/>
+              <a:latin typeface="Arial"/>
+              <a:cs typeface="Arial"/>
               <a:sym typeface="Hanken Grotesk"/>
             </a:endParaRPr>
           </a:p>
@@ -41967,18 +41948,16 @@
               <a:buNone/>
             </a:pPr>
             <a:r>
-              <a:rPr lang="en" sz="1600" b="0">
-                <a:latin typeface="Raleway Black"/>
-                <a:ea typeface="Raleway Black"/>
-                <a:cs typeface="Raleway Black"/>
+              <a:rPr lang="en" sz="1600" b="1">
+                <a:latin typeface="Arial"/>
+                <a:cs typeface="Arial"/>
                 <a:sym typeface="Raleway Black"/>
               </a:rPr>
               <a:t>Q3</a:t>
             </a:r>
-            <a:endParaRPr sz="1600" b="0">
-              <a:latin typeface="Raleway Black"/>
-              <a:ea typeface="Raleway Black"/>
-              <a:cs typeface="Raleway Black"/>
+            <a:endParaRPr sz="1600" b="1">
+              <a:latin typeface="Arial"/>
+              <a:cs typeface="Arial"/>
               <a:sym typeface="Raleway Black"/>
             </a:endParaRPr>
           </a:p>
@@ -42022,26 +42001,30 @@
               <a:buNone/>
             </a:pPr>
             <a:r>
-              <a:rPr lang="en" err="1"/>
+              <a:rPr lang="en" err="1">
+                <a:latin typeface="Arial"/>
+                <a:cs typeface="Arial"/>
+              </a:rPr>
               <a:t>Июль</a:t>
             </a:r>
             <a:r>
               <a:rPr lang="en">
-                <a:latin typeface="Hanken Grotesk"/>
-                <a:ea typeface="Hanken Grotesk"/>
-                <a:cs typeface="Hanken Grotesk"/>
+                <a:latin typeface="Arial"/>
+                <a:cs typeface="Arial"/>
                 <a:sym typeface="Hanken Grotesk"/>
               </a:rPr>
               <a:t> - </a:t>
             </a:r>
             <a:r>
-              <a:rPr lang="en" err="1"/>
+              <a:rPr lang="en" err="1">
+                <a:latin typeface="Arial"/>
+                <a:cs typeface="Arial"/>
+              </a:rPr>
               <a:t>Сентябрь</a:t>
             </a:r>
             <a:endParaRPr lang="ru-RU" err="1">
-              <a:latin typeface="Hanken Grotesk"/>
-              <a:ea typeface="Hanken Grotesk"/>
-              <a:cs typeface="Hanken Grotesk"/>
+              <a:latin typeface="Arial"/>
+              <a:cs typeface="Arial"/>
             </a:endParaRPr>
           </a:p>
         </p:txBody>
@@ -42084,18 +42067,16 @@
               <a:buNone/>
             </a:pPr>
             <a:r>
-              <a:rPr lang="en" sz="1600" b="0">
-                <a:latin typeface="Raleway Black"/>
-                <a:ea typeface="Raleway Black"/>
-                <a:cs typeface="Raleway Black"/>
+              <a:rPr lang="en" sz="1600" b="1">
+                <a:latin typeface="Arial"/>
+                <a:cs typeface="Arial"/>
                 <a:sym typeface="Raleway Black"/>
               </a:rPr>
               <a:t>Q2</a:t>
             </a:r>
-            <a:endParaRPr sz="1600" b="0">
-              <a:latin typeface="Raleway Black"/>
-              <a:ea typeface="Raleway Black"/>
-              <a:cs typeface="Raleway Black"/>
+            <a:endParaRPr sz="1600" b="1">
+              <a:latin typeface="Arial"/>
+              <a:cs typeface="Arial"/>
               <a:sym typeface="Raleway Black"/>
             </a:endParaRPr>
           </a:p>
@@ -42139,26 +42120,30 @@
               <a:buNone/>
             </a:pPr>
             <a:r>
-              <a:rPr lang="en" err="1"/>
+              <a:rPr lang="en" err="1">
+                <a:latin typeface="Arial"/>
+                <a:cs typeface="Arial"/>
+              </a:rPr>
               <a:t>Апрель</a:t>
             </a:r>
             <a:r>
               <a:rPr lang="en">
-                <a:latin typeface="Hanken Grotesk"/>
-                <a:ea typeface="Hanken Grotesk"/>
-                <a:cs typeface="Hanken Grotesk"/>
+                <a:latin typeface="Arial"/>
+                <a:cs typeface="Arial"/>
                 <a:sym typeface="Hanken Grotesk"/>
               </a:rPr>
               <a:t> - </a:t>
             </a:r>
             <a:r>
-              <a:rPr lang="en" err="1"/>
+              <a:rPr lang="en" err="1">
+                <a:latin typeface="Arial"/>
+                <a:cs typeface="Arial"/>
+              </a:rPr>
               <a:t>Июнь</a:t>
             </a:r>
             <a:endParaRPr err="1">
-              <a:latin typeface="Hanken Grotesk"/>
-              <a:ea typeface="Hanken Grotesk"/>
-              <a:cs typeface="Hanken Grotesk"/>
+              <a:latin typeface="Arial"/>
+              <a:cs typeface="Arial"/>
               <a:sym typeface="Hanken Grotesk"/>
             </a:endParaRPr>
           </a:p>
@@ -42199,18 +42184,16 @@
               <a:buNone/>
             </a:pPr>
             <a:r>
-              <a:rPr lang="en" sz="1600" b="0">
-                <a:latin typeface="Raleway Black"/>
-                <a:ea typeface="Raleway Black"/>
-                <a:cs typeface="Raleway Black"/>
+              <a:rPr lang="en" sz="1600" b="1">
+                <a:latin typeface="Arial"/>
+                <a:cs typeface="Arial"/>
                 <a:sym typeface="Raleway Black"/>
               </a:rPr>
               <a:t>Q1</a:t>
             </a:r>
-            <a:endParaRPr sz="1600" b="0">
-              <a:latin typeface="Raleway Black"/>
-              <a:ea typeface="Raleway Black"/>
-              <a:cs typeface="Raleway Black"/>
+            <a:endParaRPr sz="1600" b="1">
+              <a:latin typeface="Arial"/>
+              <a:cs typeface="Arial"/>
               <a:sym typeface="Raleway Black"/>
             </a:endParaRPr>
           </a:p>
@@ -42245,26 +42228,30 @@
               <a:buNone/>
             </a:pPr>
             <a:r>
-              <a:rPr lang="en" err="1"/>
+              <a:rPr lang="en" err="1">
+                <a:latin typeface="Arial"/>
+                <a:cs typeface="Arial"/>
+              </a:rPr>
               <a:t>Январь -</a:t>
             </a:r>
             <a:r>
               <a:rPr lang="en">
-                <a:latin typeface="Hanken Grotesk"/>
-                <a:ea typeface="Hanken Grotesk"/>
-                <a:cs typeface="Hanken Grotesk"/>
+                <a:latin typeface="Arial"/>
+                <a:cs typeface="Arial"/>
                 <a:sym typeface="Hanken Grotesk"/>
               </a:rPr>
               <a:t> </a:t>
             </a:r>
             <a:r>
-              <a:rPr lang="en" err="1"/>
+              <a:rPr lang="en" err="1">
+                <a:latin typeface="Arial"/>
+                <a:cs typeface="Arial"/>
+              </a:rPr>
               <a:t>Март</a:t>
             </a:r>
             <a:endParaRPr err="1">
-              <a:latin typeface="Hanken Grotesk"/>
-              <a:ea typeface="Hanken Grotesk"/>
-              <a:cs typeface="Hanken Grotesk"/>
+              <a:latin typeface="Arial"/>
+              <a:cs typeface="Arial"/>
               <a:sym typeface="Hanken Grotesk"/>
             </a:endParaRPr>
           </a:p>

--- a/slides/slide_09.pptx
+++ b/slides/slide_09.pptx
@@ -861,7 +861,7 @@
           <a:bodyPr/>
           <a:lstStyle/>
           <a:p>
-            <a:fld id="{BE9BB2F3-CFB6-41E7-B556-A6DD8A53B1B3}" type="datetimeFigureOut">
+            <a:fld id="{8E8E20A3-73E0-4C0F-991B-9AD99D5C8A68}" type="datetimeFigureOut">
               <a:rPr lang="en-US" smtClean="0"/>
               <a:t>11/7/2009</a:t>
             </a:fld>
@@ -1025,7 +1025,7 @@
           <a:bodyPr/>
           <a:lstStyle/>
           <a:p>
-            <a:fld id="{1BBA0D0F-FE3E-4522-8AC6-91535880918F}" type="datetimeFigureOut">
+            <a:fld id="{001ECD44-826F-4CE8-9C3E-328FB7FF1FE7}" type="datetimeFigureOut">
               <a:rPr lang="en-US" smtClean="0"/>
               <a:t>11/7/2009</a:t>
             </a:fld>
@@ -1189,7 +1189,7 @@
           <a:bodyPr/>
           <a:lstStyle/>
           <a:p>
-            <a:fld id="{C3A6F1B1-10AF-423B-9AFE-1E0945AB2BDB}" type="datetimeFigureOut">
+            <a:fld id="{8EC2B1B5-8E36-43D7-8E0C-81D0BF9316C7}" type="datetimeFigureOut">
               <a:rPr lang="en-US" smtClean="0"/>
               <a:t>11/7/2009</a:t>
             </a:fld>
@@ -13094,7 +13094,7 @@
           <a:bodyPr/>
           <a:lstStyle/>
           <a:p>
-            <a:fld id="{D1BA0C0E-C700-4DF8-AC8B-10E8E8119893}" type="datetimeFigureOut">
+            <a:fld id="{C8AB53E7-A8C0-45A1-9156-EAFCA9A78AAF}" type="datetimeFigureOut">
               <a:rPr lang="en-US" smtClean="0"/>
               <a:t>11/7/2009</a:t>
             </a:fld>
@@ -33195,7 +33195,7 @@
           <a:bodyPr/>
           <a:lstStyle/>
           <a:p>
-            <a:fld id="{7D55E840-C7AC-4AE5-B0C1-9E279C77853D}" type="datetimeFigureOut">
+            <a:fld id="{6D6A2155-2350-499B-B0A5-C1DA9F3C13AD}" type="datetimeFigureOut">
               <a:rPr lang="en-US" smtClean="0"/>
               <a:t>11/7/2009</a:t>
             </a:fld>
@@ -38842,7 +38842,7 @@
           <a:bodyPr/>
           <a:lstStyle/>
           <a:p>
-            <a:fld id="{E01106F6-7788-4CF5-964D-18B0B012EBA6}" type="datetimeFigureOut">
+            <a:fld id="{A4AB02FF-EFBE-41FB-970B-6FFA7C779EC9}" type="datetimeFigureOut">
               <a:rPr lang="en-US" smtClean="0"/>
               <a:t>11/7/2009</a:t>
             </a:fld>
@@ -39231,7 +39231,7 @@
           <a:bodyPr/>
           <a:lstStyle/>
           <a:p>
-            <a:fld id="{6436F034-4805-4785-BCE0-EBAD06B4D071}" type="datetimeFigureOut">
+            <a:fld id="{9A8ED7E1-AA9E-46E1-831F-8019529460C4}" type="datetimeFigureOut">
               <a:rPr lang="en-US" smtClean="0"/>
               <a:t>11/7/2009</a:t>
             </a:fld>
@@ -39344,7 +39344,7 @@
           <a:bodyPr/>
           <a:lstStyle/>
           <a:p>
-            <a:fld id="{2205078D-F744-4F8D-A89D-F9AA032B19D5}" type="datetimeFigureOut">
+            <a:fld id="{F2F9F2E8-BE4F-4A18-89FA-E6E3B03BB768}" type="datetimeFigureOut">
               <a:rPr lang="en-US" smtClean="0"/>
               <a:t>11/7/2009</a:t>
             </a:fld>
@@ -39434,7 +39434,7 @@
           <a:bodyPr/>
           <a:lstStyle/>
           <a:p>
-            <a:fld id="{AD707079-86BE-4A98-BE69-2EE46A4413E0}" type="datetimeFigureOut">
+            <a:fld id="{2959E735-3776-4D71-9603-7ABF4DACB02F}" type="datetimeFigureOut">
               <a:rPr lang="en-US" smtClean="0"/>
               <a:t>11/7/2009</a:t>
             </a:fld>
@@ -39689,7 +39689,7 @@
           <a:bodyPr/>
           <a:lstStyle/>
           <a:p>
-            <a:fld id="{4B8E0FE5-FD91-49BA-844B-FFEE3B87DACD}" type="datetimeFigureOut">
+            <a:fld id="{43108CA4-792B-4CA2-AF46-A66CFDA0F66C}" type="datetimeFigureOut">
               <a:rPr lang="en-US" smtClean="0"/>
               <a:t>11/7/2009</a:t>
             </a:fld>
@@ -39921,7 +39921,7 @@
           <a:bodyPr/>
           <a:lstStyle/>
           <a:p>
-            <a:fld id="{75FF442E-FEC6-479D-B211-64119F9548C4}" type="datetimeFigureOut">
+            <a:fld id="{0ACF8074-BB8E-4B8D-9951-8072EDA21091}" type="datetimeFigureOut">
               <a:rPr lang="en-US" smtClean="0"/>
               <a:t>11/7/2009</a:t>
             </a:fld>
